--- a/宣道詩/(宣道詩90)只要相信.pptx
+++ b/宣道詩/(宣道詩90)只要相信.pptx
@@ -170,10 +170,9 @@
           <a:lstStyle/>
           <a:p>
             <a:r>
-              <a:rPr lang="zh-TW" altLang="en-US" smtClean="0"/>
+              <a:rPr lang="zh-TW" altLang="en-US"/>
               <a:t>按一下以編輯母片標題樣式</a:t>
             </a:r>
-            <a:endParaRPr lang="zh-TW" altLang="en-US"/>
           </a:p>
         </p:txBody>
       </p:sp>
@@ -289,10 +288,9 @@
           </a:lstStyle>
           <a:p>
             <a:r>
-              <a:rPr lang="zh-TW" altLang="en-US" smtClean="0"/>
+              <a:rPr lang="zh-TW" altLang="en-US"/>
               <a:t>按一下以編輯母片副標題樣式</a:t>
             </a:r>
-            <a:endParaRPr lang="zh-TW" altLang="en-US"/>
           </a:p>
         </p:txBody>
       </p:sp>
@@ -313,7 +311,7 @@
           <a:p>
             <a:fld id="{1AAF066B-CAAA-4AF0-8CE1-A7DC182F2BD5}" type="datetimeFigureOut">
               <a:rPr lang="zh-TW" altLang="en-US" smtClean="0"/>
-              <a:t>2022/4/23</a:t>
+              <a:t>2024/7/20</a:t>
             </a:fld>
             <a:endParaRPr lang="zh-TW" altLang="en-US"/>
           </a:p>
@@ -402,10 +400,9 @@
           <a:lstStyle/>
           <a:p>
             <a:r>
-              <a:rPr lang="zh-TW" altLang="en-US" smtClean="0"/>
+              <a:rPr lang="zh-TW" altLang="en-US"/>
               <a:t>按一下以編輯母片標題樣式</a:t>
             </a:r>
-            <a:endParaRPr lang="zh-TW" altLang="en-US"/>
           </a:p>
         </p:txBody>
       </p:sp>
@@ -426,38 +423,37 @@
           <a:p>
             <a:pPr lvl="0"/>
             <a:r>
-              <a:rPr lang="zh-TW" altLang="en-US" smtClean="0"/>
+              <a:rPr lang="zh-TW" altLang="en-US"/>
               <a:t>按一下以編輯母片文字樣式</a:t>
             </a:r>
           </a:p>
           <a:p>
             <a:pPr lvl="1"/>
             <a:r>
-              <a:rPr lang="zh-TW" altLang="en-US" smtClean="0"/>
+              <a:rPr lang="zh-TW" altLang="en-US"/>
               <a:t>第二層</a:t>
             </a:r>
           </a:p>
           <a:p>
             <a:pPr lvl="2"/>
             <a:r>
-              <a:rPr lang="zh-TW" altLang="en-US" smtClean="0"/>
+              <a:rPr lang="zh-TW" altLang="en-US"/>
               <a:t>第三層</a:t>
             </a:r>
           </a:p>
           <a:p>
             <a:pPr lvl="3"/>
             <a:r>
-              <a:rPr lang="zh-TW" altLang="en-US" smtClean="0"/>
+              <a:rPr lang="zh-TW" altLang="en-US"/>
               <a:t>第四層</a:t>
             </a:r>
           </a:p>
           <a:p>
             <a:pPr lvl="4"/>
             <a:r>
-              <a:rPr lang="zh-TW" altLang="en-US" smtClean="0"/>
+              <a:rPr lang="zh-TW" altLang="en-US"/>
               <a:t>第五層</a:t>
             </a:r>
-            <a:endParaRPr lang="zh-TW" altLang="en-US"/>
           </a:p>
         </p:txBody>
       </p:sp>
@@ -478,7 +474,7 @@
           <a:p>
             <a:fld id="{1AAF066B-CAAA-4AF0-8CE1-A7DC182F2BD5}" type="datetimeFigureOut">
               <a:rPr lang="zh-TW" altLang="en-US" smtClean="0"/>
-              <a:t>2022/4/23</a:t>
+              <a:t>2024/7/20</a:t>
             </a:fld>
             <a:endParaRPr lang="zh-TW" altLang="en-US"/>
           </a:p>
@@ -572,10 +568,9 @@
           <a:lstStyle/>
           <a:p>
             <a:r>
-              <a:rPr lang="zh-TW" altLang="en-US" smtClean="0"/>
+              <a:rPr lang="zh-TW" altLang="en-US"/>
               <a:t>按一下以編輯母片標題樣式</a:t>
             </a:r>
-            <a:endParaRPr lang="zh-TW" altLang="en-US"/>
           </a:p>
         </p:txBody>
       </p:sp>
@@ -601,38 +596,37 @@
           <a:p>
             <a:pPr lvl="0"/>
             <a:r>
-              <a:rPr lang="zh-TW" altLang="en-US" smtClean="0"/>
+              <a:rPr lang="zh-TW" altLang="en-US"/>
               <a:t>按一下以編輯母片文字樣式</a:t>
             </a:r>
           </a:p>
           <a:p>
             <a:pPr lvl="1"/>
             <a:r>
-              <a:rPr lang="zh-TW" altLang="en-US" smtClean="0"/>
+              <a:rPr lang="zh-TW" altLang="en-US"/>
               <a:t>第二層</a:t>
             </a:r>
           </a:p>
           <a:p>
             <a:pPr lvl="2"/>
             <a:r>
-              <a:rPr lang="zh-TW" altLang="en-US" smtClean="0"/>
+              <a:rPr lang="zh-TW" altLang="en-US"/>
               <a:t>第三層</a:t>
             </a:r>
           </a:p>
           <a:p>
             <a:pPr lvl="3"/>
             <a:r>
-              <a:rPr lang="zh-TW" altLang="en-US" smtClean="0"/>
+              <a:rPr lang="zh-TW" altLang="en-US"/>
               <a:t>第四層</a:t>
             </a:r>
           </a:p>
           <a:p>
             <a:pPr lvl="4"/>
             <a:r>
-              <a:rPr lang="zh-TW" altLang="en-US" smtClean="0"/>
+              <a:rPr lang="zh-TW" altLang="en-US"/>
               <a:t>第五層</a:t>
             </a:r>
-            <a:endParaRPr lang="zh-TW" altLang="en-US"/>
           </a:p>
         </p:txBody>
       </p:sp>
@@ -653,7 +647,7 @@
           <a:p>
             <a:fld id="{1AAF066B-CAAA-4AF0-8CE1-A7DC182F2BD5}" type="datetimeFigureOut">
               <a:rPr lang="zh-TW" altLang="en-US" smtClean="0"/>
-              <a:t>2022/4/23</a:t>
+              <a:t>2024/7/20</a:t>
             </a:fld>
             <a:endParaRPr lang="zh-TW" altLang="en-US"/>
           </a:p>
@@ -742,10 +736,9 @@
           <a:lstStyle/>
           <a:p>
             <a:r>
-              <a:rPr lang="zh-TW" altLang="en-US" smtClean="0"/>
+              <a:rPr lang="zh-TW" altLang="en-US"/>
               <a:t>按一下以編輯母片標題樣式</a:t>
             </a:r>
-            <a:endParaRPr lang="zh-TW" altLang="en-US"/>
           </a:p>
         </p:txBody>
       </p:sp>
@@ -766,38 +759,37 @@
           <a:p>
             <a:pPr lvl="0"/>
             <a:r>
-              <a:rPr lang="zh-TW" altLang="en-US" smtClean="0"/>
+              <a:rPr lang="zh-TW" altLang="en-US"/>
               <a:t>按一下以編輯母片文字樣式</a:t>
             </a:r>
           </a:p>
           <a:p>
             <a:pPr lvl="1"/>
             <a:r>
-              <a:rPr lang="zh-TW" altLang="en-US" smtClean="0"/>
+              <a:rPr lang="zh-TW" altLang="en-US"/>
               <a:t>第二層</a:t>
             </a:r>
           </a:p>
           <a:p>
             <a:pPr lvl="2"/>
             <a:r>
-              <a:rPr lang="zh-TW" altLang="en-US" smtClean="0"/>
+              <a:rPr lang="zh-TW" altLang="en-US"/>
               <a:t>第三層</a:t>
             </a:r>
           </a:p>
           <a:p>
             <a:pPr lvl="3"/>
             <a:r>
-              <a:rPr lang="zh-TW" altLang="en-US" smtClean="0"/>
+              <a:rPr lang="zh-TW" altLang="en-US"/>
               <a:t>第四層</a:t>
             </a:r>
           </a:p>
           <a:p>
             <a:pPr lvl="4"/>
             <a:r>
-              <a:rPr lang="zh-TW" altLang="en-US" smtClean="0"/>
+              <a:rPr lang="zh-TW" altLang="en-US"/>
               <a:t>第五層</a:t>
             </a:r>
-            <a:endParaRPr lang="zh-TW" altLang="en-US"/>
           </a:p>
         </p:txBody>
       </p:sp>
@@ -818,7 +810,7 @@
           <a:p>
             <a:fld id="{1AAF066B-CAAA-4AF0-8CE1-A7DC182F2BD5}" type="datetimeFigureOut">
               <a:rPr lang="zh-TW" altLang="en-US" smtClean="0"/>
-              <a:t>2022/4/23</a:t>
+              <a:t>2024/7/20</a:t>
             </a:fld>
             <a:endParaRPr lang="zh-TW" altLang="en-US"/>
           </a:p>
@@ -916,10 +908,9 @@
           </a:lstStyle>
           <a:p>
             <a:r>
-              <a:rPr lang="zh-TW" altLang="en-US" smtClean="0"/>
+              <a:rPr lang="zh-TW" altLang="en-US"/>
               <a:t>按一下以編輯母片標題樣式</a:t>
             </a:r>
-            <a:endParaRPr lang="zh-TW" altLang="en-US"/>
           </a:p>
         </p:txBody>
       </p:sp>
@@ -1036,7 +1027,7 @@
           <a:p>
             <a:pPr lvl="0"/>
             <a:r>
-              <a:rPr lang="zh-TW" altLang="en-US" smtClean="0"/>
+              <a:rPr lang="zh-TW" altLang="en-US"/>
               <a:t>按一下以編輯母片文字樣式</a:t>
             </a:r>
           </a:p>
@@ -1059,7 +1050,7 @@
           <a:p>
             <a:fld id="{1AAF066B-CAAA-4AF0-8CE1-A7DC182F2BD5}" type="datetimeFigureOut">
               <a:rPr lang="zh-TW" altLang="en-US" smtClean="0"/>
-              <a:t>2022/4/23</a:t>
+              <a:t>2024/7/20</a:t>
             </a:fld>
             <a:endParaRPr lang="zh-TW" altLang="en-US"/>
           </a:p>
@@ -1148,10 +1139,9 @@
           <a:lstStyle/>
           <a:p>
             <a:r>
-              <a:rPr lang="zh-TW" altLang="en-US" smtClean="0"/>
+              <a:rPr lang="zh-TW" altLang="en-US"/>
               <a:t>按一下以編輯母片標題樣式</a:t>
             </a:r>
-            <a:endParaRPr lang="zh-TW" altLang="en-US"/>
           </a:p>
         </p:txBody>
       </p:sp>
@@ -1205,38 +1195,37 @@
           <a:p>
             <a:pPr lvl="0"/>
             <a:r>
-              <a:rPr lang="zh-TW" altLang="en-US" smtClean="0"/>
+              <a:rPr lang="zh-TW" altLang="en-US"/>
               <a:t>按一下以編輯母片文字樣式</a:t>
             </a:r>
           </a:p>
           <a:p>
             <a:pPr lvl="1"/>
             <a:r>
-              <a:rPr lang="zh-TW" altLang="en-US" smtClean="0"/>
+              <a:rPr lang="zh-TW" altLang="en-US"/>
               <a:t>第二層</a:t>
             </a:r>
           </a:p>
           <a:p>
             <a:pPr lvl="2"/>
             <a:r>
-              <a:rPr lang="zh-TW" altLang="en-US" smtClean="0"/>
+              <a:rPr lang="zh-TW" altLang="en-US"/>
               <a:t>第三層</a:t>
             </a:r>
           </a:p>
           <a:p>
             <a:pPr lvl="3"/>
             <a:r>
-              <a:rPr lang="zh-TW" altLang="en-US" smtClean="0"/>
+              <a:rPr lang="zh-TW" altLang="en-US"/>
               <a:t>第四層</a:t>
             </a:r>
           </a:p>
           <a:p>
             <a:pPr lvl="4"/>
             <a:r>
-              <a:rPr lang="zh-TW" altLang="en-US" smtClean="0"/>
+              <a:rPr lang="zh-TW" altLang="en-US"/>
               <a:t>第五層</a:t>
             </a:r>
-            <a:endParaRPr lang="zh-TW" altLang="en-US"/>
           </a:p>
         </p:txBody>
       </p:sp>
@@ -1290,38 +1279,37 @@
           <a:p>
             <a:pPr lvl="0"/>
             <a:r>
-              <a:rPr lang="zh-TW" altLang="en-US" smtClean="0"/>
+              <a:rPr lang="zh-TW" altLang="en-US"/>
               <a:t>按一下以編輯母片文字樣式</a:t>
             </a:r>
           </a:p>
           <a:p>
             <a:pPr lvl="1"/>
             <a:r>
-              <a:rPr lang="zh-TW" altLang="en-US" smtClean="0"/>
+              <a:rPr lang="zh-TW" altLang="en-US"/>
               <a:t>第二層</a:t>
             </a:r>
           </a:p>
           <a:p>
             <a:pPr lvl="2"/>
             <a:r>
-              <a:rPr lang="zh-TW" altLang="en-US" smtClean="0"/>
+              <a:rPr lang="zh-TW" altLang="en-US"/>
               <a:t>第三層</a:t>
             </a:r>
           </a:p>
           <a:p>
             <a:pPr lvl="3"/>
             <a:r>
-              <a:rPr lang="zh-TW" altLang="en-US" smtClean="0"/>
+              <a:rPr lang="zh-TW" altLang="en-US"/>
               <a:t>第四層</a:t>
             </a:r>
           </a:p>
           <a:p>
             <a:pPr lvl="4"/>
             <a:r>
-              <a:rPr lang="zh-TW" altLang="en-US" smtClean="0"/>
+              <a:rPr lang="zh-TW" altLang="en-US"/>
               <a:t>第五層</a:t>
             </a:r>
-            <a:endParaRPr lang="zh-TW" altLang="en-US"/>
           </a:p>
         </p:txBody>
       </p:sp>
@@ -1342,7 +1330,7 @@
           <a:p>
             <a:fld id="{1AAF066B-CAAA-4AF0-8CE1-A7DC182F2BD5}" type="datetimeFigureOut">
               <a:rPr lang="zh-TW" altLang="en-US" smtClean="0"/>
-              <a:t>2022/4/23</a:t>
+              <a:t>2024/7/20</a:t>
             </a:fld>
             <a:endParaRPr lang="zh-TW" altLang="en-US"/>
           </a:p>
@@ -1435,10 +1423,9 @@
           </a:lstStyle>
           <a:p>
             <a:r>
-              <a:rPr lang="zh-TW" altLang="en-US" smtClean="0"/>
+              <a:rPr lang="zh-TW" altLang="en-US"/>
               <a:t>按一下以編輯母片標題樣式</a:t>
             </a:r>
-            <a:endParaRPr lang="zh-TW" altLang="en-US"/>
           </a:p>
         </p:txBody>
       </p:sp>
@@ -1501,7 +1488,7 @@
           <a:p>
             <a:pPr lvl="0"/>
             <a:r>
-              <a:rPr lang="zh-TW" altLang="en-US" smtClean="0"/>
+              <a:rPr lang="zh-TW" altLang="en-US"/>
               <a:t>按一下以編輯母片文字樣式</a:t>
             </a:r>
           </a:p>
@@ -1557,38 +1544,37 @@
           <a:p>
             <a:pPr lvl="0"/>
             <a:r>
-              <a:rPr lang="zh-TW" altLang="en-US" smtClean="0"/>
+              <a:rPr lang="zh-TW" altLang="en-US"/>
               <a:t>按一下以編輯母片文字樣式</a:t>
             </a:r>
           </a:p>
           <a:p>
             <a:pPr lvl="1"/>
             <a:r>
-              <a:rPr lang="zh-TW" altLang="en-US" smtClean="0"/>
+              <a:rPr lang="zh-TW" altLang="en-US"/>
               <a:t>第二層</a:t>
             </a:r>
           </a:p>
           <a:p>
             <a:pPr lvl="2"/>
             <a:r>
-              <a:rPr lang="zh-TW" altLang="en-US" smtClean="0"/>
+              <a:rPr lang="zh-TW" altLang="en-US"/>
               <a:t>第三層</a:t>
             </a:r>
           </a:p>
           <a:p>
             <a:pPr lvl="3"/>
             <a:r>
-              <a:rPr lang="zh-TW" altLang="en-US" smtClean="0"/>
+              <a:rPr lang="zh-TW" altLang="en-US"/>
               <a:t>第四層</a:t>
             </a:r>
           </a:p>
           <a:p>
             <a:pPr lvl="4"/>
             <a:r>
-              <a:rPr lang="zh-TW" altLang="en-US" smtClean="0"/>
+              <a:rPr lang="zh-TW" altLang="en-US"/>
               <a:t>第五層</a:t>
             </a:r>
-            <a:endParaRPr lang="zh-TW" altLang="en-US"/>
           </a:p>
         </p:txBody>
       </p:sp>
@@ -1651,7 +1637,7 @@
           <a:p>
             <a:pPr lvl="0"/>
             <a:r>
-              <a:rPr lang="zh-TW" altLang="en-US" smtClean="0"/>
+              <a:rPr lang="zh-TW" altLang="en-US"/>
               <a:t>按一下以編輯母片文字樣式</a:t>
             </a:r>
           </a:p>
@@ -1707,38 +1693,37 @@
           <a:p>
             <a:pPr lvl="0"/>
             <a:r>
-              <a:rPr lang="zh-TW" altLang="en-US" smtClean="0"/>
+              <a:rPr lang="zh-TW" altLang="en-US"/>
               <a:t>按一下以編輯母片文字樣式</a:t>
             </a:r>
           </a:p>
           <a:p>
             <a:pPr lvl="1"/>
             <a:r>
-              <a:rPr lang="zh-TW" altLang="en-US" smtClean="0"/>
+              <a:rPr lang="zh-TW" altLang="en-US"/>
               <a:t>第二層</a:t>
             </a:r>
           </a:p>
           <a:p>
             <a:pPr lvl="2"/>
             <a:r>
-              <a:rPr lang="zh-TW" altLang="en-US" smtClean="0"/>
+              <a:rPr lang="zh-TW" altLang="en-US"/>
               <a:t>第三層</a:t>
             </a:r>
           </a:p>
           <a:p>
             <a:pPr lvl="3"/>
             <a:r>
-              <a:rPr lang="zh-TW" altLang="en-US" smtClean="0"/>
+              <a:rPr lang="zh-TW" altLang="en-US"/>
               <a:t>第四層</a:t>
             </a:r>
           </a:p>
           <a:p>
             <a:pPr lvl="4"/>
             <a:r>
-              <a:rPr lang="zh-TW" altLang="en-US" smtClean="0"/>
+              <a:rPr lang="zh-TW" altLang="en-US"/>
               <a:t>第五層</a:t>
             </a:r>
-            <a:endParaRPr lang="zh-TW" altLang="en-US"/>
           </a:p>
         </p:txBody>
       </p:sp>
@@ -1759,7 +1744,7 @@
           <a:p>
             <a:fld id="{1AAF066B-CAAA-4AF0-8CE1-A7DC182F2BD5}" type="datetimeFigureOut">
               <a:rPr lang="zh-TW" altLang="en-US" smtClean="0"/>
-              <a:t>2022/4/23</a:t>
+              <a:t>2024/7/20</a:t>
             </a:fld>
             <a:endParaRPr lang="zh-TW" altLang="en-US"/>
           </a:p>
@@ -1848,10 +1833,9 @@
           <a:lstStyle/>
           <a:p>
             <a:r>
-              <a:rPr lang="zh-TW" altLang="en-US" smtClean="0"/>
+              <a:rPr lang="zh-TW" altLang="en-US"/>
               <a:t>按一下以編輯母片標題樣式</a:t>
             </a:r>
-            <a:endParaRPr lang="zh-TW" altLang="en-US"/>
           </a:p>
         </p:txBody>
       </p:sp>
@@ -1872,7 +1856,7 @@
           <a:p>
             <a:fld id="{1AAF066B-CAAA-4AF0-8CE1-A7DC182F2BD5}" type="datetimeFigureOut">
               <a:rPr lang="zh-TW" altLang="en-US" smtClean="0"/>
-              <a:t>2022/4/23</a:t>
+              <a:t>2024/7/20</a:t>
             </a:fld>
             <a:endParaRPr lang="zh-TW" altLang="en-US"/>
           </a:p>
@@ -1962,7 +1946,7 @@
           <a:p>
             <a:fld id="{1AAF066B-CAAA-4AF0-8CE1-A7DC182F2BD5}" type="datetimeFigureOut">
               <a:rPr lang="zh-TW" altLang="en-US" smtClean="0"/>
-              <a:t>2022/4/23</a:t>
+              <a:t>2024/7/20</a:t>
             </a:fld>
             <a:endParaRPr lang="zh-TW" altLang="en-US"/>
           </a:p>
@@ -2060,10 +2044,9 @@
           </a:lstStyle>
           <a:p>
             <a:r>
-              <a:rPr lang="zh-TW" altLang="en-US" smtClean="0"/>
+              <a:rPr lang="zh-TW" altLang="en-US"/>
               <a:t>按一下以編輯母片標題樣式</a:t>
             </a:r>
-            <a:endParaRPr lang="zh-TW" altLang="en-US"/>
           </a:p>
         </p:txBody>
       </p:sp>
@@ -2117,38 +2100,37 @@
           <a:p>
             <a:pPr lvl="0"/>
             <a:r>
-              <a:rPr lang="zh-TW" altLang="en-US" smtClean="0"/>
+              <a:rPr lang="zh-TW" altLang="en-US"/>
               <a:t>按一下以編輯母片文字樣式</a:t>
             </a:r>
           </a:p>
           <a:p>
             <a:pPr lvl="1"/>
             <a:r>
-              <a:rPr lang="zh-TW" altLang="en-US" smtClean="0"/>
+              <a:rPr lang="zh-TW" altLang="en-US"/>
               <a:t>第二層</a:t>
             </a:r>
           </a:p>
           <a:p>
             <a:pPr lvl="2"/>
             <a:r>
-              <a:rPr lang="zh-TW" altLang="en-US" smtClean="0"/>
+              <a:rPr lang="zh-TW" altLang="en-US"/>
               <a:t>第三層</a:t>
             </a:r>
           </a:p>
           <a:p>
             <a:pPr lvl="3"/>
             <a:r>
-              <a:rPr lang="zh-TW" altLang="en-US" smtClean="0"/>
+              <a:rPr lang="zh-TW" altLang="en-US"/>
               <a:t>第四層</a:t>
             </a:r>
           </a:p>
           <a:p>
             <a:pPr lvl="4"/>
             <a:r>
-              <a:rPr lang="zh-TW" altLang="en-US" smtClean="0"/>
+              <a:rPr lang="zh-TW" altLang="en-US"/>
               <a:t>第五層</a:t>
             </a:r>
-            <a:endParaRPr lang="zh-TW" altLang="en-US"/>
           </a:p>
         </p:txBody>
       </p:sp>
@@ -2211,7 +2193,7 @@
           <a:p>
             <a:pPr lvl="0"/>
             <a:r>
-              <a:rPr lang="zh-TW" altLang="en-US" smtClean="0"/>
+              <a:rPr lang="zh-TW" altLang="en-US"/>
               <a:t>按一下以編輯母片文字樣式</a:t>
             </a:r>
           </a:p>
@@ -2234,7 +2216,7 @@
           <a:p>
             <a:fld id="{1AAF066B-CAAA-4AF0-8CE1-A7DC182F2BD5}" type="datetimeFigureOut">
               <a:rPr lang="zh-TW" altLang="en-US" smtClean="0"/>
-              <a:t>2022/4/23</a:t>
+              <a:t>2024/7/20</a:t>
             </a:fld>
             <a:endParaRPr lang="zh-TW" altLang="en-US"/>
           </a:p>
@@ -2332,10 +2314,9 @@
           </a:lstStyle>
           <a:p>
             <a:r>
-              <a:rPr lang="zh-TW" altLang="en-US" smtClean="0"/>
+              <a:rPr lang="zh-TW" altLang="en-US"/>
               <a:t>按一下以編輯母片標題樣式</a:t>
             </a:r>
-            <a:endParaRPr lang="zh-TW" altLang="en-US"/>
           </a:p>
         </p:txBody>
       </p:sp>
@@ -2397,10 +2378,9 @@
           </a:lstStyle>
           <a:p>
             <a:r>
-              <a:rPr lang="zh-TW" altLang="en-US" smtClean="0"/>
+              <a:rPr lang="zh-TW" altLang="en-US"/>
               <a:t>按一下圖示以新增圖片</a:t>
             </a:r>
-            <a:endParaRPr lang="zh-TW" altLang="en-US"/>
           </a:p>
         </p:txBody>
       </p:sp>
@@ -2463,7 +2443,7 @@
           <a:p>
             <a:pPr lvl="0"/>
             <a:r>
-              <a:rPr lang="zh-TW" altLang="en-US" smtClean="0"/>
+              <a:rPr lang="zh-TW" altLang="en-US"/>
               <a:t>按一下以編輯母片文字樣式</a:t>
             </a:r>
           </a:p>
@@ -2486,7 +2466,7 @@
           <a:p>
             <a:fld id="{1AAF066B-CAAA-4AF0-8CE1-A7DC182F2BD5}" type="datetimeFigureOut">
               <a:rPr lang="zh-TW" altLang="en-US" smtClean="0"/>
-              <a:t>2022/4/23</a:t>
+              <a:t>2024/7/20</a:t>
             </a:fld>
             <a:endParaRPr lang="zh-TW" altLang="en-US"/>
           </a:p>
@@ -2595,10 +2575,9 @@
           <a:lstStyle/>
           <a:p>
             <a:r>
-              <a:rPr lang="zh-TW" altLang="en-US" smtClean="0"/>
+              <a:rPr lang="zh-TW" altLang="en-US"/>
               <a:t>按一下以編輯母片標題樣式</a:t>
             </a:r>
-            <a:endParaRPr lang="zh-TW" altLang="en-US"/>
           </a:p>
         </p:txBody>
       </p:sp>
@@ -2629,38 +2608,37 @@
           <a:p>
             <a:pPr lvl="0"/>
             <a:r>
-              <a:rPr lang="zh-TW" altLang="en-US" smtClean="0"/>
+              <a:rPr lang="zh-TW" altLang="en-US"/>
               <a:t>按一下以編輯母片文字樣式</a:t>
             </a:r>
           </a:p>
           <a:p>
             <a:pPr lvl="1"/>
             <a:r>
-              <a:rPr lang="zh-TW" altLang="en-US" smtClean="0"/>
+              <a:rPr lang="zh-TW" altLang="en-US"/>
               <a:t>第二層</a:t>
             </a:r>
           </a:p>
           <a:p>
             <a:pPr lvl="2"/>
             <a:r>
-              <a:rPr lang="zh-TW" altLang="en-US" smtClean="0"/>
+              <a:rPr lang="zh-TW" altLang="en-US"/>
               <a:t>第三層</a:t>
             </a:r>
           </a:p>
           <a:p>
             <a:pPr lvl="3"/>
             <a:r>
-              <a:rPr lang="zh-TW" altLang="en-US" smtClean="0"/>
+              <a:rPr lang="zh-TW" altLang="en-US"/>
               <a:t>第四層</a:t>
             </a:r>
           </a:p>
           <a:p>
             <a:pPr lvl="4"/>
             <a:r>
-              <a:rPr lang="zh-TW" altLang="en-US" smtClean="0"/>
+              <a:rPr lang="zh-TW" altLang="en-US"/>
               <a:t>第五層</a:t>
             </a:r>
-            <a:endParaRPr lang="zh-TW" altLang="en-US"/>
           </a:p>
         </p:txBody>
       </p:sp>
@@ -2699,7 +2677,7 @@
           <a:p>
             <a:fld id="{1AAF066B-CAAA-4AF0-8CE1-A7DC182F2BD5}" type="datetimeFigureOut">
               <a:rPr lang="zh-TW" altLang="en-US" smtClean="0"/>
-              <a:t>2022/4/23</a:t>
+              <a:t>2024/7/20</a:t>
             </a:fld>
             <a:endParaRPr lang="zh-TW" altLang="en-US"/>
           </a:p>
@@ -3109,7 +3087,7 @@
               <a:t>宣道詩 </a:t>
             </a:r>
             <a:r>
-              <a:rPr lang="en-US" altLang="zh-CN" sz="5333" b="1" u="sng" dirty="0" smtClean="0">
+              <a:rPr lang="en-US" altLang="zh-CN" sz="5333" b="1" u="sng" dirty="0">
                 <a:solidFill>
                   <a:srgbClr val="660033"/>
                 </a:solidFill>
@@ -3125,23 +3103,6 @@
               </a:rPr>
               <a:t>90</a:t>
             </a:r>
-            <a:r>
-              <a:rPr lang="en-US" altLang="zh-CN" sz="7200" b="1" i="1" dirty="0">
-                <a:solidFill>
-                  <a:srgbClr val="660033"/>
-                </a:solidFill>
-                <a:effectLst>
-                  <a:outerShdw blurRad="38100" dist="38100" dir="2700000" algn="tl">
-                    <a:srgbClr val="000000">
-                      <a:alpha val="43137"/>
-                    </a:srgbClr>
-                  </a:outerShdw>
-                </a:effectLst>
-                <a:latin typeface="微軟正黑體" pitchFamily="34" charset="-120"/>
-                <a:ea typeface="微軟正黑體" pitchFamily="34" charset="-120"/>
-              </a:rPr>
-              <a:t/>
-            </a:r>
             <a:br>
               <a:rPr lang="en-US" altLang="zh-CN" sz="7200" b="1" i="1" dirty="0">
                 <a:solidFill>
@@ -3159,7 +3120,7 @@
               </a:rPr>
             </a:br>
             <a:r>
-              <a:rPr lang="zh-CN" altLang="en-US" sz="8000" b="1" dirty="0" smtClean="0">
+              <a:rPr lang="zh-CN" altLang="en-US" sz="8000" b="1" dirty="0">
                 <a:solidFill>
                   <a:srgbClr val="000066"/>
                 </a:solidFill>
@@ -3173,24 +3134,7 @@
                 <a:latin typeface="微軟正黑體" pitchFamily="34" charset="-120"/>
                 <a:ea typeface="微軟正黑體" pitchFamily="34" charset="-120"/>
               </a:rPr>
-              <a:t>只</a:t>
-            </a:r>
-            <a:r>
-              <a:rPr lang="zh-CN" altLang="en-US" sz="8000" b="1" dirty="0">
-                <a:solidFill>
-                  <a:srgbClr val="000066"/>
-                </a:solidFill>
-                <a:effectLst>
-                  <a:outerShdw blurRad="38100" dist="38100" dir="2700000" algn="tl">
-                    <a:srgbClr val="000000">
-                      <a:alpha val="43137"/>
-                    </a:srgbClr>
-                  </a:outerShdw>
-                </a:effectLst>
-                <a:latin typeface="微軟正黑體" pitchFamily="34" charset="-120"/>
-                <a:ea typeface="微軟正黑體" pitchFamily="34" charset="-120"/>
-              </a:rPr>
-              <a:t>要相信</a:t>
+              <a:t>只要相信</a:t>
             </a:r>
             <a:endParaRPr lang="zh-TW" altLang="en-US" sz="8000" b="1" dirty="0">
               <a:solidFill>
@@ -3219,13 +3163,6 @@
   <p:clrMapOvr>
     <a:masterClrMapping/>
   </p:clrMapOvr>
-  <p:timing>
-    <p:tnLst>
-      <p:par>
-        <p:cTn id="1" dur="indefinite" restart="never" nodeType="tmRoot"/>
-      </p:par>
-    </p:tnLst>
-  </p:timing>
 </p:sld>
 </file>
 
@@ -3322,7 +3259,7 @@
         <p:spPr>
           <a:xfrm>
             <a:off x="0" y="5061182"/>
-            <a:ext cx="12192000" cy="830997"/>
+            <a:ext cx="12192000" cy="646331"/>
           </a:xfrm>
           <a:prstGeom prst="rect">
             <a:avLst/>
@@ -3337,33 +3274,40 @@
           <a:p>
             <a:pPr algn="ctr"/>
             <a:r>
-              <a:rPr lang="en-US" sz="4800" b="1" dirty="0">
+              <a:rPr lang="en-US" sz="3600" b="1" dirty="0">
                 <a:solidFill>
                   <a:srgbClr val="000066"/>
                 </a:solidFill>
+                <a:latin typeface="Microsoft JhengHei" panose="020B0604030504040204" pitchFamily="34" charset="-120"/>
+                <a:ea typeface="Microsoft JhengHei" panose="020B0604030504040204" pitchFamily="34" charset="-120"/>
               </a:rPr>
-              <a:t>( </a:t>
-            </a:r>
-            <a:r>
-              <a:rPr lang="en-US" sz="4800" b="1" dirty="0" smtClean="0">
+              <a:t>( 2 </a:t>
+            </a:r>
+            <a:r>
+              <a:rPr lang="zh-CN" altLang="en-US" sz="3600" b="1" dirty="0">
                 <a:solidFill>
                   <a:srgbClr val="000066"/>
                 </a:solidFill>
+                <a:latin typeface="Microsoft JhengHei" panose="020B0604030504040204" pitchFamily="34" charset="-120"/>
+                <a:ea typeface="Microsoft JhengHei" panose="020B0604030504040204" pitchFamily="34" charset="-120"/>
               </a:rPr>
-              <a:t>x2 </a:t>
-            </a:r>
-            <a:r>
-              <a:rPr lang="en-US" sz="4800" b="1" dirty="0">
+              <a:t>次</a:t>
+            </a:r>
+            <a:r>
+              <a:rPr lang="en-US" sz="3600" b="1" dirty="0">
                 <a:solidFill>
                   <a:srgbClr val="000066"/>
                 </a:solidFill>
+                <a:latin typeface="Microsoft JhengHei" panose="020B0604030504040204" pitchFamily="34" charset="-120"/>
+                <a:ea typeface="Microsoft JhengHei" panose="020B0604030504040204" pitchFamily="34" charset="-120"/>
               </a:rPr>
-              <a:t>)</a:t>
-            </a:r>
-            <a:endParaRPr lang="vi-VN" sz="4800" b="1" dirty="0">
+              <a:t> )</a:t>
+            </a:r>
+            <a:endParaRPr lang="vi-VN" sz="3600" b="1" dirty="0">
               <a:solidFill>
                 <a:srgbClr val="000066"/>
               </a:solidFill>
+              <a:ea typeface="Microsoft JhengHei" panose="020B0604030504040204" pitchFamily="34" charset="-120"/>
             </a:endParaRPr>
           </a:p>
         </p:txBody>
@@ -3378,13 +3322,6 @@
   <p:clrMapOvr>
     <a:masterClrMapping/>
   </p:clrMapOvr>
-  <p:timing>
-    <p:tnLst>
-      <p:par>
-        <p:cTn id="1" dur="indefinite" restart="never" nodeType="tmRoot"/>
-      </p:par>
-    </p:tnLst>
-  </p:timing>
 </p:sld>
 </file>
 
@@ -3438,27 +3375,7 @@
                 <a:latin typeface="微軟正黑體" pitchFamily="34" charset="-120"/>
                 <a:ea typeface="微軟正黑體" pitchFamily="34" charset="-120"/>
               </a:rPr>
-              <a:t>小群不要怕  </a:t>
-            </a:r>
-            <a:r>
-              <a:rPr lang="zh-CN" altLang="en-US" sz="6400" b="1" dirty="0" smtClean="0">
-                <a:solidFill>
-                  <a:srgbClr val="000066"/>
-                </a:solidFill>
-                <a:latin typeface="微軟正黑體" pitchFamily="34" charset="-120"/>
-                <a:ea typeface="微軟正黑體" pitchFamily="34" charset="-120"/>
-              </a:rPr>
-              <a:t> 牧</a:t>
-            </a:r>
-            <a:r>
-              <a:rPr lang="zh-CN" altLang="en-US" sz="6400" b="1" dirty="0">
-                <a:solidFill>
-                  <a:srgbClr val="000066"/>
-                </a:solidFill>
-                <a:latin typeface="微軟正黑體" pitchFamily="34" charset="-120"/>
-                <a:ea typeface="微軟正黑體" pitchFamily="34" charset="-120"/>
-              </a:rPr>
-              <a:t>者已捨身</a:t>
+              <a:t>小群不要怕   牧者已捨身</a:t>
             </a:r>
             <a:endParaRPr lang="en-US" altLang="zh-CN" sz="6400" b="1" dirty="0">
               <a:solidFill>
@@ -3480,27 +3397,7 @@
                 <a:latin typeface="微軟正黑體" pitchFamily="34" charset="-120"/>
                 <a:ea typeface="微軟正黑體" pitchFamily="34" charset="-120"/>
               </a:rPr>
-              <a:t>曾死十架上  </a:t>
-            </a:r>
-            <a:r>
-              <a:rPr lang="zh-CN" altLang="en-US" sz="6400" b="1" dirty="0" smtClean="0">
-                <a:solidFill>
-                  <a:srgbClr val="000066"/>
-                </a:solidFill>
-                <a:latin typeface="微軟正黑體" pitchFamily="34" charset="-120"/>
-                <a:ea typeface="微軟正黑體" pitchFamily="34" charset="-120"/>
-              </a:rPr>
-              <a:t> 由</a:t>
-            </a:r>
-            <a:r>
-              <a:rPr lang="zh-CN" altLang="en-US" sz="6400" b="1" dirty="0">
-                <a:solidFill>
-                  <a:srgbClr val="000066"/>
-                </a:solidFill>
-                <a:latin typeface="微軟正黑體" pitchFamily="34" charset="-120"/>
-                <a:ea typeface="微軟正黑體" pitchFamily="34" charset="-120"/>
-              </a:rPr>
-              <a:t>墳墓復生</a:t>
+              <a:t>曾死十架上   由墳墓復生</a:t>
             </a:r>
             <a:endParaRPr lang="en-US" altLang="zh-CN" sz="6400" b="1" dirty="0">
               <a:solidFill>
@@ -3521,7 +3418,7 @@
         <p:spPr>
           <a:xfrm>
             <a:off x="0" y="5061182"/>
-            <a:ext cx="12192000" cy="830997"/>
+            <a:ext cx="12192000" cy="707886"/>
           </a:xfrm>
           <a:prstGeom prst="rect">
             <a:avLst/>
@@ -3536,30 +3433,14 @@
           <a:p>
             <a:pPr algn="ctr"/>
             <a:r>
-              <a:rPr lang="en-US" sz="4800" b="1" dirty="0">
+              <a:rPr lang="en-US" sz="4000" b="1" dirty="0">
                 <a:solidFill>
                   <a:srgbClr val="000066"/>
                 </a:solidFill>
               </a:rPr>
-              <a:t>( </a:t>
-            </a:r>
-            <a:r>
-              <a:rPr lang="en-US" sz="4800" b="1" dirty="0" smtClean="0">
-                <a:solidFill>
-                  <a:srgbClr val="000066"/>
-                </a:solidFill>
-              </a:rPr>
-              <a:t>1 / 3 </a:t>
-            </a:r>
-            <a:r>
-              <a:rPr lang="en-US" sz="4800" b="1" dirty="0">
-                <a:solidFill>
-                  <a:srgbClr val="000066"/>
-                </a:solidFill>
-              </a:rPr>
-              <a:t>)</a:t>
-            </a:r>
-            <a:endParaRPr lang="vi-VN" sz="4800" b="1" dirty="0">
+              <a:t>( 1 / 3 )</a:t>
+            </a:r>
+            <a:endParaRPr lang="vi-VN" sz="4000" b="1" dirty="0">
               <a:solidFill>
                 <a:srgbClr val="000066"/>
               </a:solidFill>
@@ -3577,13 +3458,6 @@
   <p:clrMapOvr>
     <a:masterClrMapping/>
   </p:clrMapOvr>
-  <p:timing>
-    <p:tnLst>
-      <p:par>
-        <p:cTn id="1" dur="indefinite" restart="never" nodeType="tmRoot"/>
-      </p:par>
-    </p:tnLst>
-  </p:timing>
 </p:sld>
 </file>
 
@@ -3680,7 +3554,7 @@
         <p:spPr>
           <a:xfrm>
             <a:off x="0" y="5061182"/>
-            <a:ext cx="12192000" cy="830997"/>
+            <a:ext cx="12192000" cy="707886"/>
           </a:xfrm>
           <a:prstGeom prst="rect">
             <a:avLst/>
@@ -3695,14 +3569,14 @@
           <a:p>
             <a:pPr algn="ctr"/>
             <a:r>
-              <a:rPr lang="en-US" sz="4800" b="1" dirty="0">
+              <a:rPr lang="en-US" sz="4000" b="1" dirty="0">
                 <a:solidFill>
                   <a:srgbClr val="000066"/>
                 </a:solidFill>
               </a:rPr>
               <a:t>( 1 / 3 )</a:t>
             </a:r>
-            <a:endParaRPr lang="vi-VN" sz="4800" b="1" dirty="0">
+            <a:endParaRPr lang="vi-VN" sz="4000" b="1" dirty="0">
               <a:solidFill>
                 <a:srgbClr val="000066"/>
               </a:solidFill>
@@ -3720,13 +3594,6 @@
   <p:clrMapOvr>
     <a:masterClrMapping/>
   </p:clrMapOvr>
-  <p:timing>
-    <p:tnLst>
-      <p:par>
-        <p:cTn id="1" dur="indefinite" restart="never" nodeType="tmRoot"/>
-      </p:par>
-    </p:tnLst>
-  </p:timing>
 </p:sld>
 </file>
 
@@ -3823,7 +3690,7 @@
         <p:spPr>
           <a:xfrm>
             <a:off x="0" y="5061182"/>
-            <a:ext cx="12192000" cy="830997"/>
+            <a:ext cx="12192000" cy="646331"/>
           </a:xfrm>
           <a:prstGeom prst="rect">
             <a:avLst/>
@@ -3838,33 +3705,40 @@
           <a:p>
             <a:pPr algn="ctr"/>
             <a:r>
-              <a:rPr lang="en-US" sz="4800" b="1" dirty="0">
+              <a:rPr lang="en-US" sz="3600" b="1" dirty="0">
                 <a:solidFill>
                   <a:srgbClr val="000066"/>
                 </a:solidFill>
+                <a:latin typeface="Microsoft JhengHei" panose="020B0604030504040204" pitchFamily="34" charset="-120"/>
+                <a:ea typeface="Microsoft JhengHei" panose="020B0604030504040204" pitchFamily="34" charset="-120"/>
               </a:rPr>
-              <a:t>( </a:t>
-            </a:r>
-            <a:r>
-              <a:rPr lang="en-US" sz="4800" b="1" dirty="0" smtClean="0">
+              <a:t>( 2 </a:t>
+            </a:r>
+            <a:r>
+              <a:rPr lang="zh-CN" altLang="en-US" sz="3600" b="1" dirty="0">
                 <a:solidFill>
                   <a:srgbClr val="000066"/>
                 </a:solidFill>
+                <a:latin typeface="Microsoft JhengHei" panose="020B0604030504040204" pitchFamily="34" charset="-120"/>
+                <a:ea typeface="Microsoft JhengHei" panose="020B0604030504040204" pitchFamily="34" charset="-120"/>
               </a:rPr>
-              <a:t>x2 </a:t>
-            </a:r>
-            <a:r>
-              <a:rPr lang="en-US" sz="4800" b="1" dirty="0">
+              <a:t>次</a:t>
+            </a:r>
+            <a:r>
+              <a:rPr lang="en-US" sz="3600" b="1" dirty="0">
                 <a:solidFill>
                   <a:srgbClr val="000066"/>
                 </a:solidFill>
+                <a:latin typeface="Microsoft JhengHei" panose="020B0604030504040204" pitchFamily="34" charset="-120"/>
+                <a:ea typeface="Microsoft JhengHei" panose="020B0604030504040204" pitchFamily="34" charset="-120"/>
               </a:rPr>
-              <a:t>)</a:t>
-            </a:r>
-            <a:endParaRPr lang="vi-VN" sz="4800" b="1" dirty="0">
+              <a:t> )</a:t>
+            </a:r>
+            <a:endParaRPr lang="vi-VN" sz="3600" b="1" dirty="0">
               <a:solidFill>
                 <a:srgbClr val="000066"/>
               </a:solidFill>
+              <a:ea typeface="Microsoft JhengHei" panose="020B0604030504040204" pitchFamily="34" charset="-120"/>
             </a:endParaRPr>
           </a:p>
         </p:txBody>
@@ -3879,13 +3753,6 @@
   <p:clrMapOvr>
     <a:masterClrMapping/>
   </p:clrMapOvr>
-  <p:timing>
-    <p:tnLst>
-      <p:par>
-        <p:cTn id="1" dur="indefinite" restart="never" nodeType="tmRoot"/>
-      </p:par>
-    </p:tnLst>
-  </p:timing>
 </p:sld>
 </file>
 
@@ -3939,27 +3806,7 @@
                 <a:latin typeface="微軟正黑體" pitchFamily="34" charset="-120"/>
                 <a:ea typeface="微軟正黑體" pitchFamily="34" charset="-120"/>
               </a:rPr>
-              <a:t>小群不要怕  </a:t>
-            </a:r>
-            <a:r>
-              <a:rPr lang="zh-CN" altLang="en-US" sz="6400" b="1" dirty="0" smtClean="0">
-                <a:solidFill>
-                  <a:srgbClr val="000066"/>
-                </a:solidFill>
-                <a:latin typeface="微軟正黑體" pitchFamily="34" charset="-120"/>
-                <a:ea typeface="微軟正黑體" pitchFamily="34" charset="-120"/>
-              </a:rPr>
-              <a:t> 隨</a:t>
-            </a:r>
-            <a:r>
-              <a:rPr lang="zh-CN" altLang="en-US" sz="6400" b="1" dirty="0">
-                <a:solidFill>
-                  <a:srgbClr val="000066"/>
-                </a:solidFill>
-                <a:latin typeface="微軟正黑體" pitchFamily="34" charset="-120"/>
-                <a:ea typeface="微軟正黑體" pitchFamily="34" charset="-120"/>
-              </a:rPr>
-              <a:t>牧者領路</a:t>
+              <a:t>小群不要怕   隨牧者領路</a:t>
             </a:r>
             <a:endParaRPr lang="en-US" altLang="zh-CN" sz="6400" b="1" dirty="0">
               <a:solidFill>
@@ -3981,27 +3828,7 @@
                 <a:latin typeface="微軟正黑體" pitchFamily="34" charset="-120"/>
                 <a:ea typeface="微軟正黑體" pitchFamily="34" charset="-120"/>
               </a:rPr>
-              <a:t>所走的路程  </a:t>
-            </a:r>
-            <a:r>
-              <a:rPr lang="zh-CN" altLang="en-US" sz="6400" b="1" dirty="0" smtClean="0">
-                <a:solidFill>
-                  <a:srgbClr val="000066"/>
-                </a:solidFill>
-                <a:latin typeface="微軟正黑體" pitchFamily="34" charset="-120"/>
-                <a:ea typeface="微軟正黑體" pitchFamily="34" charset="-120"/>
-              </a:rPr>
-              <a:t> 須</a:t>
-            </a:r>
-            <a:r>
-              <a:rPr lang="zh-CN" altLang="en-US" sz="6400" b="1" dirty="0">
-                <a:solidFill>
-                  <a:srgbClr val="000066"/>
-                </a:solidFill>
-                <a:latin typeface="微軟正黑體" pitchFamily="34" charset="-120"/>
-                <a:ea typeface="微軟正黑體" pitchFamily="34" charset="-120"/>
-              </a:rPr>
-              <a:t>隨主腳步</a:t>
+              <a:t>所走的路程   須隨主腳步</a:t>
             </a:r>
             <a:endParaRPr lang="en-US" altLang="zh-CN" sz="6400" b="1" dirty="0">
               <a:solidFill>
@@ -4022,7 +3849,7 @@
         <p:spPr>
           <a:xfrm>
             <a:off x="0" y="5061182"/>
-            <a:ext cx="12192000" cy="830997"/>
+            <a:ext cx="12192000" cy="707886"/>
           </a:xfrm>
           <a:prstGeom prst="rect">
             <a:avLst/>
@@ -4037,30 +3864,14 @@
           <a:p>
             <a:pPr algn="ctr"/>
             <a:r>
-              <a:rPr lang="en-US" sz="4800" b="1" dirty="0">
+              <a:rPr lang="en-US" sz="4000" b="1" dirty="0">
                 <a:solidFill>
                   <a:srgbClr val="000066"/>
                 </a:solidFill>
               </a:rPr>
-              <a:t>( </a:t>
-            </a:r>
-            <a:r>
-              <a:rPr lang="en-US" sz="4800" b="1" dirty="0" smtClean="0">
-                <a:solidFill>
-                  <a:srgbClr val="000066"/>
-                </a:solidFill>
-              </a:rPr>
-              <a:t>2 </a:t>
-            </a:r>
-            <a:r>
-              <a:rPr lang="en-US" sz="4800" b="1" dirty="0">
-                <a:solidFill>
-                  <a:srgbClr val="000066"/>
-                </a:solidFill>
-              </a:rPr>
-              <a:t>/ 3 )</a:t>
-            </a:r>
-            <a:endParaRPr lang="vi-VN" sz="4800" b="1" dirty="0">
+              <a:t>( 2 / 3 )</a:t>
+            </a:r>
+            <a:endParaRPr lang="vi-VN" sz="4000" b="1" dirty="0">
               <a:solidFill>
                 <a:srgbClr val="000066"/>
               </a:solidFill>
@@ -4078,13 +3889,6 @@
   <p:clrMapOvr>
     <a:masterClrMapping/>
   </p:clrMapOvr>
-  <p:timing>
-    <p:tnLst>
-      <p:par>
-        <p:cTn id="1" dur="indefinite" restart="never" nodeType="tmRoot"/>
-      </p:par>
-    </p:tnLst>
-  </p:timing>
 </p:sld>
 </file>
 
@@ -4181,7 +3985,7 @@
         <p:spPr>
           <a:xfrm>
             <a:off x="0" y="5061182"/>
-            <a:ext cx="12192000" cy="830997"/>
+            <a:ext cx="12192000" cy="707886"/>
           </a:xfrm>
           <a:prstGeom prst="rect">
             <a:avLst/>
@@ -4196,14 +4000,14 @@
           <a:p>
             <a:pPr algn="ctr"/>
             <a:r>
-              <a:rPr lang="en-US" sz="4800" b="1" dirty="0">
+              <a:rPr lang="en-US" sz="4000" b="1" dirty="0">
                 <a:solidFill>
                   <a:srgbClr val="000066"/>
                 </a:solidFill>
               </a:rPr>
               <a:t>( 2 / 3 )</a:t>
             </a:r>
-            <a:endParaRPr lang="vi-VN" sz="4800" b="1" dirty="0">
+            <a:endParaRPr lang="vi-VN" sz="4000" b="1" dirty="0">
               <a:solidFill>
                 <a:srgbClr val="000066"/>
               </a:solidFill>
@@ -4221,13 +4025,6 @@
   <p:clrMapOvr>
     <a:masterClrMapping/>
   </p:clrMapOvr>
-  <p:timing>
-    <p:tnLst>
-      <p:par>
-        <p:cTn id="1" dur="indefinite" restart="never" nodeType="tmRoot"/>
-      </p:par>
-    </p:tnLst>
-  </p:timing>
 </p:sld>
 </file>
 
@@ -4324,7 +4121,7 @@
         <p:spPr>
           <a:xfrm>
             <a:off x="0" y="5061182"/>
-            <a:ext cx="12192000" cy="830997"/>
+            <a:ext cx="12192000" cy="646331"/>
           </a:xfrm>
           <a:prstGeom prst="rect">
             <a:avLst/>
@@ -4339,33 +4136,40 @@
           <a:p>
             <a:pPr algn="ctr"/>
             <a:r>
-              <a:rPr lang="en-US" sz="4800" b="1" dirty="0">
+              <a:rPr lang="en-US" sz="3600" b="1" dirty="0">
                 <a:solidFill>
                   <a:srgbClr val="000066"/>
                 </a:solidFill>
+                <a:latin typeface="Microsoft JhengHei" panose="020B0604030504040204" pitchFamily="34" charset="-120"/>
+                <a:ea typeface="Microsoft JhengHei" panose="020B0604030504040204" pitchFamily="34" charset="-120"/>
               </a:rPr>
-              <a:t>( </a:t>
-            </a:r>
-            <a:r>
-              <a:rPr lang="en-US" sz="4800" b="1" dirty="0" smtClean="0">
+              <a:t>( 2 </a:t>
+            </a:r>
+            <a:r>
+              <a:rPr lang="zh-CN" altLang="en-US" sz="3600" b="1" dirty="0">
                 <a:solidFill>
                   <a:srgbClr val="000066"/>
                 </a:solidFill>
+                <a:latin typeface="Microsoft JhengHei" panose="020B0604030504040204" pitchFamily="34" charset="-120"/>
+                <a:ea typeface="Microsoft JhengHei" panose="020B0604030504040204" pitchFamily="34" charset="-120"/>
               </a:rPr>
-              <a:t>x2 </a:t>
-            </a:r>
-            <a:r>
-              <a:rPr lang="en-US" sz="4800" b="1" dirty="0">
+              <a:t>次</a:t>
+            </a:r>
+            <a:r>
+              <a:rPr lang="en-US" sz="3600" b="1" dirty="0">
                 <a:solidFill>
                   <a:srgbClr val="000066"/>
                 </a:solidFill>
+                <a:latin typeface="Microsoft JhengHei" panose="020B0604030504040204" pitchFamily="34" charset="-120"/>
+                <a:ea typeface="Microsoft JhengHei" panose="020B0604030504040204" pitchFamily="34" charset="-120"/>
               </a:rPr>
-              <a:t>)</a:t>
-            </a:r>
-            <a:endParaRPr lang="vi-VN" sz="4800" b="1" dirty="0">
+              <a:t> )</a:t>
+            </a:r>
+            <a:endParaRPr lang="vi-VN" sz="3600" b="1" dirty="0">
               <a:solidFill>
                 <a:srgbClr val="000066"/>
               </a:solidFill>
+              <a:ea typeface="Microsoft JhengHei" panose="020B0604030504040204" pitchFamily="34" charset="-120"/>
             </a:endParaRPr>
           </a:p>
         </p:txBody>
@@ -4380,13 +4184,6 @@
   <p:clrMapOvr>
     <a:masterClrMapping/>
   </p:clrMapOvr>
-  <p:timing>
-    <p:tnLst>
-      <p:par>
-        <p:cTn id="1" dur="indefinite" restart="never" nodeType="tmRoot"/>
-      </p:par>
-    </p:tnLst>
-  </p:timing>
 </p:sld>
 </file>
 
@@ -4483,7 +4280,7 @@
         <p:spPr>
           <a:xfrm>
             <a:off x="0" y="5061182"/>
-            <a:ext cx="12192000" cy="830997"/>
+            <a:ext cx="12192000" cy="707886"/>
           </a:xfrm>
           <a:prstGeom prst="rect">
             <a:avLst/>
@@ -4498,30 +4295,14 @@
           <a:p>
             <a:pPr algn="ctr"/>
             <a:r>
-              <a:rPr lang="en-US" sz="4800" b="1" dirty="0">
+              <a:rPr lang="en-US" sz="4000" b="1" dirty="0">
                 <a:solidFill>
                   <a:srgbClr val="000066"/>
                 </a:solidFill>
               </a:rPr>
-              <a:t>( </a:t>
-            </a:r>
-            <a:r>
-              <a:rPr lang="en-US" sz="4800" b="1" dirty="0" smtClean="0">
-                <a:solidFill>
-                  <a:srgbClr val="000066"/>
-                </a:solidFill>
-              </a:rPr>
-              <a:t>3 </a:t>
-            </a:r>
-            <a:r>
-              <a:rPr lang="en-US" sz="4800" b="1" dirty="0">
-                <a:solidFill>
-                  <a:srgbClr val="000066"/>
-                </a:solidFill>
-              </a:rPr>
-              <a:t>/ 3 )</a:t>
-            </a:r>
-            <a:endParaRPr lang="vi-VN" sz="4800" b="1" dirty="0">
+              <a:t>( 3 / 3 )</a:t>
+            </a:r>
+            <a:endParaRPr lang="vi-VN" sz="4000" b="1" dirty="0">
               <a:solidFill>
                 <a:srgbClr val="000066"/>
               </a:solidFill>
@@ -4539,13 +4320,6 @@
   <p:clrMapOvr>
     <a:masterClrMapping/>
   </p:clrMapOvr>
-  <p:timing>
-    <p:tnLst>
-      <p:par>
-        <p:cTn id="1" dur="indefinite" restart="never" nodeType="tmRoot"/>
-      </p:par>
-    </p:tnLst>
-  </p:timing>
 </p:sld>
 </file>
 
@@ -4642,7 +4416,7 @@
         <p:spPr>
           <a:xfrm>
             <a:off x="0" y="5061182"/>
-            <a:ext cx="12192000" cy="830997"/>
+            <a:ext cx="12192000" cy="707886"/>
           </a:xfrm>
           <a:prstGeom prst="rect">
             <a:avLst/>
@@ -4657,14 +4431,14 @@
           <a:p>
             <a:pPr algn="ctr"/>
             <a:r>
-              <a:rPr lang="en-US" sz="4800" b="1">
+              <a:rPr lang="en-US" sz="4000" b="1" dirty="0">
                 <a:solidFill>
                   <a:srgbClr val="000066"/>
                 </a:solidFill>
               </a:rPr>
               <a:t>( 3 / 3 )</a:t>
             </a:r>
-            <a:endParaRPr lang="vi-VN" sz="4800" b="1" dirty="0">
+            <a:endParaRPr lang="vi-VN" sz="4000" b="1" dirty="0">
               <a:solidFill>
                 <a:srgbClr val="000066"/>
               </a:solidFill>
@@ -4682,13 +4456,6 @@
   <p:clrMapOvr>
     <a:masterClrMapping/>
   </p:clrMapOvr>
-  <p:timing>
-    <p:tnLst>
-      <p:par>
-        <p:cTn id="1" dur="indefinite" restart="never" nodeType="tmRoot"/>
-      </p:par>
-    </p:tnLst>
-  </p:timing>
 </p:sld>
 </file>
 
